--- a/10-Knowledge-Products/KP1-GEA/videos/module_4/en/decks/KP1_M4_Deck_v0.2.pptx
+++ b/10-Knowledge-Products/KP1-GEA/videos/module_4/en/decks/KP1_M4_Deck_v0.2.pptx
@@ -1773,7 +1773,7 @@
           <a:lstStyle/>
           <a:p>
             <a:r>
-              <a:t>VO: Start by scoring Progressa's capabilities against PAERA-anchored standards. Register a learner: low maturity — three lists, none authoritative. Prove identity: medium — the Identity Authority exists but education does not consume it. Certify a result: high — the Examination Authority does this well. Share data across bodies: very low — almost everything is paper. A simple maturity score per capability turns a vague sense that things are bad into a picture of exactly where the sector is weak and where it is strong.</a:t>
+              <a:t>VO: Start by scoring Progressa's capabilities against the reference architecture's standards. Register a learner: low maturity — three lists, none authoritative. Prove identity: medium — the Identity Authority exists but education does not consume it. Certify a result: high — the Examination Authority does this well. Share data across bodies: very low — almost everything is paper. A simple maturity score per capability turns a vague sense that things are bad into a picture of exactly where the sector is weak and where it is strong.</a:t>
             </a:r>
           </a:p>
         </p:txBody>

--- a/10-Knowledge-Products/KP1-GEA/videos/module_4/en/decks/KP1_M4_Deck_v0.2.pptx
+++ b/10-Knowledge-Products/KP1-GEA/videos/module_4/en/decks/KP1_M4_Deck_v0.2.pptx
@@ -16937,7 +16937,7 @@
                 </a:solidFill>
                 <a:latin typeface="Arial"/>
               </a:rPr>
-              <a:t>~4 minutes · standalone video · voice-over on text slides</a:t>
+              <a:t>standalone video · voice-over on text slides</a:t>
             </a:r>
           </a:p>
         </p:txBody>
@@ -19503,7 +19503,7 @@
                 </a:solidFill>
                 <a:latin typeface="Arial"/>
               </a:rPr>
-              <a:t>~3 minutes · standalone video · voice-over on text slides</a:t>
+              <a:t>standalone video · voice-over on text slides</a:t>
             </a:r>
           </a:p>
         </p:txBody>
@@ -22707,7 +22707,7 @@
                 </a:solidFill>
                 <a:latin typeface="Arial"/>
               </a:rPr>
-              <a:t>~3 minutes · standalone video · voice-over on text slides</a:t>
+              <a:t>standalone video · voice-over on text slides</a:t>
             </a:r>
           </a:p>
         </p:txBody>
@@ -23391,7 +23391,7 @@
                 </a:solidFill>
                 <a:latin typeface="Arial"/>
               </a:rPr>
-              <a:t>~3 minutes · standalone video · voice-over on text slides</a:t>
+              <a:t>standalone video · voice-over on text slides</a:t>
             </a:r>
           </a:p>
         </p:txBody>
@@ -25704,7 +25704,7 @@
                 </a:solidFill>
                 <a:latin typeface="Arial"/>
               </a:rPr>
-              <a:t>~4 minutes · standalone video · voice-over on text slides</a:t>
+              <a:t>standalone video · voice-over on text slides</a:t>
             </a:r>
           </a:p>
         </p:txBody>
@@ -28328,7 +28328,7 @@
                 </a:solidFill>
                 <a:latin typeface="Arial"/>
               </a:rPr>
-              <a:t>~4 minutes · standalone video · voice-over on text slides</a:t>
+              <a:t>standalone video · voice-over on text slides</a:t>
             </a:r>
           </a:p>
         </p:txBody>
@@ -31778,7 +31778,7 @@
                 </a:solidFill>
                 <a:latin typeface="Arial"/>
               </a:rPr>
-              <a:t>~3 minutes · standalone video · voice-over on text slides</a:t>
+              <a:t>standalone video · voice-over on text slides</a:t>
             </a:r>
           </a:p>
         </p:txBody>
@@ -33480,7 +33480,7 @@
                 </a:solidFill>
                 <a:latin typeface="Arial"/>
               </a:rPr>
-              <a:t>~4 minutes · standalone video · voice-over on text slides</a:t>
+              <a:t>standalone video · voice-over on text slides</a:t>
             </a:r>
           </a:p>
         </p:txBody>

--- a/10-Knowledge-Products/KP1-GEA/videos/module_4/en/decks/KP1_M4_Deck_v0.2.pptx
+++ b/10-Knowledge-Products/KP1-GEA/videos/module_4/en/decks/KP1_M4_Deck_v0.2.pptx
@@ -16801,7 +16801,7 @@
                 </a:solidFill>
                 <a:latin typeface="Arial"/>
               </a:rPr>
-              <a:t>KP1 · MODULE 4 · VIDEO 4.2</a:t>
+              <a:t>MODULE 4 · VIDEO 4.2</a:t>
             </a:r>
           </a:p>
         </p:txBody>
@@ -19367,7 +19367,7 @@
                 </a:solidFill>
                 <a:latin typeface="Arial"/>
               </a:rPr>
-              <a:t>KP1 · MODULE 4 · VIDEO 4.3</a:t>
+              <a:t>MODULE 4 · VIDEO 4.3</a:t>
             </a:r>
           </a:p>
         </p:txBody>
@@ -22571,7 +22571,7 @@
                 </a:solidFill>
                 <a:latin typeface="Arial"/>
               </a:rPr>
-              <a:t>KP1 · MODULE 4 · VIDEO 4.4</a:t>
+              <a:t>MODULE 4 · VIDEO 4.4</a:t>
             </a:r>
           </a:p>
         </p:txBody>
@@ -23255,7 +23255,7 @@
                 </a:solidFill>
                 <a:latin typeface="Arial"/>
               </a:rPr>
-              <a:t>KP1 · MODULE 4 · VIDEO 4.1</a:t>
+              <a:t>MODULE 4 · VIDEO 4.1</a:t>
             </a:r>
           </a:p>
         </p:txBody>
@@ -25568,7 +25568,7 @@
                 </a:solidFill>
                 <a:latin typeface="Arial"/>
               </a:rPr>
-              <a:t>KP1 · MODULE 4 · VIDEO 4.5</a:t>
+              <a:t>MODULE 4 · VIDEO 4.5</a:t>
             </a:r>
           </a:p>
         </p:txBody>
@@ -28192,7 +28192,7 @@
                 </a:solidFill>
                 <a:latin typeface="Arial"/>
               </a:rPr>
-              <a:t>KP1 · MODULE 4 · VIDEO 4.6</a:t>
+              <a:t>MODULE 4 · VIDEO 4.6</a:t>
             </a:r>
           </a:p>
         </p:txBody>
@@ -31642,7 +31642,7 @@
                 </a:solidFill>
                 <a:latin typeface="Arial"/>
               </a:rPr>
-              <a:t>KP1 · MODULE 4 · VIDEO 4.7</a:t>
+              <a:t>MODULE 4 · VIDEO 4.7</a:t>
             </a:r>
           </a:p>
         </p:txBody>
@@ -33344,7 +33344,7 @@
                 </a:solidFill>
                 <a:latin typeface="Arial"/>
               </a:rPr>
-              <a:t>KP1 · MODULE 4 · VIDEO 4.8</a:t>
+              <a:t>MODULE 4 · VIDEO 4.8</a:t>
             </a:r>
           </a:p>
         </p:txBody>
